--- a/public/videos/repositories/gyosei-quiz-one/gyosei-quiz-one-tech-preview.pptx
+++ b/public/videos/repositories/gyosei-quiz-one/gyosei-quiz-one-tech-preview.pptx
@@ -134,7 +134,7 @@
           <p:cNvPr id="2" name="タイトル 1">
             <a:extLst>
               <a:ext uri="{FF2B5EF4-FFF2-40B4-BE49-F238E27FC236}">
-                <a16:creationId xmlns:a16="http://schemas.microsoft.com/office/drawing/2014/main" id="{F4B2BB9D-B611-6858-DF34-9A4956204006}"/>
+                <a16:creationId xmlns:a16="http://schemas.microsoft.com/office/drawing/2014/main" id="{F531294B-3B78-BBEF-D01C-F9CCCC59D244}"/>
               </a:ext>
             </a:extLst>
           </p:cNvPr>
@@ -171,7 +171,7 @@
           <p:cNvPr id="3" name="字幕 2">
             <a:extLst>
               <a:ext uri="{FF2B5EF4-FFF2-40B4-BE49-F238E27FC236}">
-                <a16:creationId xmlns:a16="http://schemas.microsoft.com/office/drawing/2014/main" id="{101DAC41-818D-B1F9-70A0-27925D5A1E7F}"/>
+                <a16:creationId xmlns:a16="http://schemas.microsoft.com/office/drawing/2014/main" id="{7184A69F-8761-4C8C-3D14-A7EC4B17E7AF}"/>
               </a:ext>
             </a:extLst>
           </p:cNvPr>
@@ -241,7 +241,7 @@
           <p:cNvPr id="4" name="日付プレースホルダー 3">
             <a:extLst>
               <a:ext uri="{FF2B5EF4-FFF2-40B4-BE49-F238E27FC236}">
-                <a16:creationId xmlns:a16="http://schemas.microsoft.com/office/drawing/2014/main" id="{114BEF78-9C69-F1AD-6F46-630DFFB80591}"/>
+                <a16:creationId xmlns:a16="http://schemas.microsoft.com/office/drawing/2014/main" id="{46212659-BAA0-AD3A-069B-CB322B6F0CF6}"/>
               </a:ext>
             </a:extLst>
           </p:cNvPr>
@@ -257,7 +257,7 @@
           <a:bodyPr/>
           <a:lstStyle/>
           <a:p>
-            <a:fld id="{6B460330-058B-41A5-929E-057FBC60E669}" type="datetimeFigureOut">
+            <a:fld id="{6D622BDD-7D80-4750-852E-DC532991A77C}" type="datetimeFigureOut">
               <a:rPr kumimoji="1" lang="ja-JP" altLang="en-US" smtClean="0"/>
               <a:t>2026/7/30</a:t>
             </a:fld>
@@ -270,7 +270,7 @@
           <p:cNvPr id="5" name="フッター プレースホルダー 4">
             <a:extLst>
               <a:ext uri="{FF2B5EF4-FFF2-40B4-BE49-F238E27FC236}">
-                <a16:creationId xmlns:a16="http://schemas.microsoft.com/office/drawing/2014/main" id="{BD74EBCB-B7BC-1BB6-1727-90364B629B04}"/>
+                <a16:creationId xmlns:a16="http://schemas.microsoft.com/office/drawing/2014/main" id="{EE620E95-F843-A1B7-7443-7AA7AFE98072}"/>
               </a:ext>
             </a:extLst>
           </p:cNvPr>
@@ -295,7 +295,7 @@
           <p:cNvPr id="6" name="スライド番号プレースホルダー 5">
             <a:extLst>
               <a:ext uri="{FF2B5EF4-FFF2-40B4-BE49-F238E27FC236}">
-                <a16:creationId xmlns:a16="http://schemas.microsoft.com/office/drawing/2014/main" id="{35708954-2286-0210-6DAC-46E33C03A5E3}"/>
+                <a16:creationId xmlns:a16="http://schemas.microsoft.com/office/drawing/2014/main" id="{EE637BB8-1D04-7AAF-F9F1-3A5DF668F730}"/>
               </a:ext>
             </a:extLst>
           </p:cNvPr>
@@ -311,7 +311,7 @@
           <a:bodyPr/>
           <a:lstStyle/>
           <a:p>
-            <a:fld id="{95D83E16-B3B0-4562-9F2C-FEBC5A07F3E0}" type="slidenum">
+            <a:fld id="{48583633-3BA6-4F30-8C90-7AD0190FE42B}" type="slidenum">
               <a:rPr kumimoji="1" lang="ja-JP" altLang="en-US" smtClean="0"/>
               <a:t>‹#›</a:t>
             </a:fld>
@@ -322,7 +322,7 @@
     </p:spTree>
     <p:extLst>
       <p:ext uri="{BB962C8B-B14F-4D97-AF65-F5344CB8AC3E}">
-        <p14:creationId xmlns:p14="http://schemas.microsoft.com/office/powerpoint/2010/main" val="1930444783"/>
+        <p14:creationId xmlns:p14="http://schemas.microsoft.com/office/powerpoint/2010/main" val="2304435196"/>
       </p:ext>
     </p:extLst>
   </p:cSld>
@@ -354,7 +354,7 @@
           <p:cNvPr id="2" name="タイトル 1">
             <a:extLst>
               <a:ext uri="{FF2B5EF4-FFF2-40B4-BE49-F238E27FC236}">
-                <a16:creationId xmlns:a16="http://schemas.microsoft.com/office/drawing/2014/main" id="{7C9EC690-4DFC-D651-3314-2CE42D2B8DBD}"/>
+                <a16:creationId xmlns:a16="http://schemas.microsoft.com/office/drawing/2014/main" id="{F618DC8E-1F06-6663-30B0-1DA0C6E2030B}"/>
               </a:ext>
             </a:extLst>
           </p:cNvPr>
@@ -382,7 +382,7 @@
           <p:cNvPr id="3" name="縦書きテキスト プレースホルダー 2">
             <a:extLst>
               <a:ext uri="{FF2B5EF4-FFF2-40B4-BE49-F238E27FC236}">
-                <a16:creationId xmlns:a16="http://schemas.microsoft.com/office/drawing/2014/main" id="{3E98523F-F029-86FA-1E67-858E458D80CB}"/>
+                <a16:creationId xmlns:a16="http://schemas.microsoft.com/office/drawing/2014/main" id="{BB9FFF3B-1166-B295-019A-764450C2D891}"/>
               </a:ext>
             </a:extLst>
           </p:cNvPr>
@@ -471,7 +471,7 @@
           <p:cNvPr id="4" name="日付プレースホルダー 3">
             <a:extLst>
               <a:ext uri="{FF2B5EF4-FFF2-40B4-BE49-F238E27FC236}">
-                <a16:creationId xmlns:a16="http://schemas.microsoft.com/office/drawing/2014/main" id="{CD75262C-1C4C-C9B6-C0A5-2A6E01CF735D}"/>
+                <a16:creationId xmlns:a16="http://schemas.microsoft.com/office/drawing/2014/main" id="{0FC0D05D-A576-6080-C71B-7D8C27B0FB16}"/>
               </a:ext>
             </a:extLst>
           </p:cNvPr>
@@ -487,7 +487,7 @@
           <a:bodyPr/>
           <a:lstStyle/>
           <a:p>
-            <a:fld id="{6B460330-058B-41A5-929E-057FBC60E669}" type="datetimeFigureOut">
+            <a:fld id="{6D622BDD-7D80-4750-852E-DC532991A77C}" type="datetimeFigureOut">
               <a:rPr kumimoji="1" lang="ja-JP" altLang="en-US" smtClean="0"/>
               <a:t>2026/7/30</a:t>
             </a:fld>
@@ -500,7 +500,7 @@
           <p:cNvPr id="5" name="フッター プレースホルダー 4">
             <a:extLst>
               <a:ext uri="{FF2B5EF4-FFF2-40B4-BE49-F238E27FC236}">
-                <a16:creationId xmlns:a16="http://schemas.microsoft.com/office/drawing/2014/main" id="{F39FCB7F-741B-3647-4A17-E24759B05461}"/>
+                <a16:creationId xmlns:a16="http://schemas.microsoft.com/office/drawing/2014/main" id="{133BC360-A593-0A64-5B0C-E25D85D0EAD8}"/>
               </a:ext>
             </a:extLst>
           </p:cNvPr>
@@ -525,7 +525,7 @@
           <p:cNvPr id="6" name="スライド番号プレースホルダー 5">
             <a:extLst>
               <a:ext uri="{FF2B5EF4-FFF2-40B4-BE49-F238E27FC236}">
-                <a16:creationId xmlns:a16="http://schemas.microsoft.com/office/drawing/2014/main" id="{E38F8CAF-C3B1-C15B-909A-509872B74835}"/>
+                <a16:creationId xmlns:a16="http://schemas.microsoft.com/office/drawing/2014/main" id="{362AD2FA-09F8-A767-5571-81056C37004B}"/>
               </a:ext>
             </a:extLst>
           </p:cNvPr>
@@ -541,7 +541,7 @@
           <a:bodyPr/>
           <a:lstStyle/>
           <a:p>
-            <a:fld id="{95D83E16-B3B0-4562-9F2C-FEBC5A07F3E0}" type="slidenum">
+            <a:fld id="{48583633-3BA6-4F30-8C90-7AD0190FE42B}" type="slidenum">
               <a:rPr kumimoji="1" lang="ja-JP" altLang="en-US" smtClean="0"/>
               <a:t>‹#›</a:t>
             </a:fld>
@@ -552,7 +552,7 @@
     </p:spTree>
     <p:extLst>
       <p:ext uri="{BB962C8B-B14F-4D97-AF65-F5344CB8AC3E}">
-        <p14:creationId xmlns:p14="http://schemas.microsoft.com/office/powerpoint/2010/main" val="630814551"/>
+        <p14:creationId xmlns:p14="http://schemas.microsoft.com/office/powerpoint/2010/main" val="2619474528"/>
       </p:ext>
     </p:extLst>
   </p:cSld>
@@ -584,7 +584,7 @@
           <p:cNvPr id="2" name="縦書きタイトル 1">
             <a:extLst>
               <a:ext uri="{FF2B5EF4-FFF2-40B4-BE49-F238E27FC236}">
-                <a16:creationId xmlns:a16="http://schemas.microsoft.com/office/drawing/2014/main" id="{CB62E2C8-EABE-A69B-981D-CB08CB788DBA}"/>
+                <a16:creationId xmlns:a16="http://schemas.microsoft.com/office/drawing/2014/main" id="{11B7D285-38B1-9E15-3C94-259DF601D6A6}"/>
               </a:ext>
             </a:extLst>
           </p:cNvPr>
@@ -617,7 +617,7 @@
           <p:cNvPr id="3" name="縦書きテキスト プレースホルダー 2">
             <a:extLst>
               <a:ext uri="{FF2B5EF4-FFF2-40B4-BE49-F238E27FC236}">
-                <a16:creationId xmlns:a16="http://schemas.microsoft.com/office/drawing/2014/main" id="{DDBB0298-EFCD-3576-F86D-B9607705A1E4}"/>
+                <a16:creationId xmlns:a16="http://schemas.microsoft.com/office/drawing/2014/main" id="{6F121554-CA21-F7F9-B577-548FAE3404C3}"/>
               </a:ext>
             </a:extLst>
           </p:cNvPr>
@@ -711,7 +711,7 @@
           <p:cNvPr id="4" name="日付プレースホルダー 3">
             <a:extLst>
               <a:ext uri="{FF2B5EF4-FFF2-40B4-BE49-F238E27FC236}">
-                <a16:creationId xmlns:a16="http://schemas.microsoft.com/office/drawing/2014/main" id="{4F7ED3D7-33A9-AC26-E97F-BFBAB5AECCF0}"/>
+                <a16:creationId xmlns:a16="http://schemas.microsoft.com/office/drawing/2014/main" id="{6B5EE53A-0D30-0DAA-E40F-8498F04A70A2}"/>
               </a:ext>
             </a:extLst>
           </p:cNvPr>
@@ -727,7 +727,7 @@
           <a:bodyPr/>
           <a:lstStyle/>
           <a:p>
-            <a:fld id="{6B460330-058B-41A5-929E-057FBC60E669}" type="datetimeFigureOut">
+            <a:fld id="{6D622BDD-7D80-4750-852E-DC532991A77C}" type="datetimeFigureOut">
               <a:rPr kumimoji="1" lang="ja-JP" altLang="en-US" smtClean="0"/>
               <a:t>2026/7/30</a:t>
             </a:fld>
@@ -740,7 +740,7 @@
           <p:cNvPr id="5" name="フッター プレースホルダー 4">
             <a:extLst>
               <a:ext uri="{FF2B5EF4-FFF2-40B4-BE49-F238E27FC236}">
-                <a16:creationId xmlns:a16="http://schemas.microsoft.com/office/drawing/2014/main" id="{83DA2E5D-8793-20C1-F8C0-7ADC0777D169}"/>
+                <a16:creationId xmlns:a16="http://schemas.microsoft.com/office/drawing/2014/main" id="{5BF45178-C7B4-5DAF-4704-80B6B3B509FC}"/>
               </a:ext>
             </a:extLst>
           </p:cNvPr>
@@ -765,7 +765,7 @@
           <p:cNvPr id="6" name="スライド番号プレースホルダー 5">
             <a:extLst>
               <a:ext uri="{FF2B5EF4-FFF2-40B4-BE49-F238E27FC236}">
-                <a16:creationId xmlns:a16="http://schemas.microsoft.com/office/drawing/2014/main" id="{C4BADCAD-9EB1-D3A8-1D4A-B1B122FD1CFB}"/>
+                <a16:creationId xmlns:a16="http://schemas.microsoft.com/office/drawing/2014/main" id="{044FF388-79FF-CC63-DBE5-FC7C66CCE4BA}"/>
               </a:ext>
             </a:extLst>
           </p:cNvPr>
@@ -781,7 +781,7 @@
           <a:bodyPr/>
           <a:lstStyle/>
           <a:p>
-            <a:fld id="{95D83E16-B3B0-4562-9F2C-FEBC5A07F3E0}" type="slidenum">
+            <a:fld id="{48583633-3BA6-4F30-8C90-7AD0190FE42B}" type="slidenum">
               <a:rPr kumimoji="1" lang="ja-JP" altLang="en-US" smtClean="0"/>
               <a:t>‹#›</a:t>
             </a:fld>
@@ -792,7 +792,7 @@
     </p:spTree>
     <p:extLst>
       <p:ext uri="{BB962C8B-B14F-4D97-AF65-F5344CB8AC3E}">
-        <p14:creationId xmlns:p14="http://schemas.microsoft.com/office/powerpoint/2010/main" val="340840456"/>
+        <p14:creationId xmlns:p14="http://schemas.microsoft.com/office/powerpoint/2010/main" val="2609563593"/>
       </p:ext>
     </p:extLst>
   </p:cSld>
@@ -824,7 +824,7 @@
           <p:cNvPr id="2" name="タイトル 1">
             <a:extLst>
               <a:ext uri="{FF2B5EF4-FFF2-40B4-BE49-F238E27FC236}">
-                <a16:creationId xmlns:a16="http://schemas.microsoft.com/office/drawing/2014/main" id="{89415944-CF08-61F5-5C81-992E1F835582}"/>
+                <a16:creationId xmlns:a16="http://schemas.microsoft.com/office/drawing/2014/main" id="{7E306983-3EF2-B62E-1C52-256CF28083AF}"/>
               </a:ext>
             </a:extLst>
           </p:cNvPr>
@@ -852,7 +852,7 @@
           <p:cNvPr id="3" name="コンテンツ プレースホルダー 2">
             <a:extLst>
               <a:ext uri="{FF2B5EF4-FFF2-40B4-BE49-F238E27FC236}">
-                <a16:creationId xmlns:a16="http://schemas.microsoft.com/office/drawing/2014/main" id="{31FCDFA6-52FD-3D0A-2B61-9FD135BDF65B}"/>
+                <a16:creationId xmlns:a16="http://schemas.microsoft.com/office/drawing/2014/main" id="{7B529E2F-53B1-B754-525F-BBE2BD56B0F3}"/>
               </a:ext>
             </a:extLst>
           </p:cNvPr>
@@ -941,7 +941,7 @@
           <p:cNvPr id="4" name="日付プレースホルダー 3">
             <a:extLst>
               <a:ext uri="{FF2B5EF4-FFF2-40B4-BE49-F238E27FC236}">
-                <a16:creationId xmlns:a16="http://schemas.microsoft.com/office/drawing/2014/main" id="{A56F3B30-1CA2-FB20-A8CA-283777AABC44}"/>
+                <a16:creationId xmlns:a16="http://schemas.microsoft.com/office/drawing/2014/main" id="{6B5363E4-C86F-8BF5-CC02-1CDFD204367D}"/>
               </a:ext>
             </a:extLst>
           </p:cNvPr>
@@ -957,7 +957,7 @@
           <a:bodyPr/>
           <a:lstStyle/>
           <a:p>
-            <a:fld id="{6B460330-058B-41A5-929E-057FBC60E669}" type="datetimeFigureOut">
+            <a:fld id="{6D622BDD-7D80-4750-852E-DC532991A77C}" type="datetimeFigureOut">
               <a:rPr kumimoji="1" lang="ja-JP" altLang="en-US" smtClean="0"/>
               <a:t>2026/7/30</a:t>
             </a:fld>
@@ -970,7 +970,7 @@
           <p:cNvPr id="5" name="フッター プレースホルダー 4">
             <a:extLst>
               <a:ext uri="{FF2B5EF4-FFF2-40B4-BE49-F238E27FC236}">
-                <a16:creationId xmlns:a16="http://schemas.microsoft.com/office/drawing/2014/main" id="{0388124B-AAC5-CA3D-F50D-5B85E46286DB}"/>
+                <a16:creationId xmlns:a16="http://schemas.microsoft.com/office/drawing/2014/main" id="{A84841A4-8BB7-8B92-15B8-5FBF337DB787}"/>
               </a:ext>
             </a:extLst>
           </p:cNvPr>
@@ -995,7 +995,7 @@
           <p:cNvPr id="6" name="スライド番号プレースホルダー 5">
             <a:extLst>
               <a:ext uri="{FF2B5EF4-FFF2-40B4-BE49-F238E27FC236}">
-                <a16:creationId xmlns:a16="http://schemas.microsoft.com/office/drawing/2014/main" id="{FBAECA12-D58B-1FAF-52D3-5C1B8F5CF7EF}"/>
+                <a16:creationId xmlns:a16="http://schemas.microsoft.com/office/drawing/2014/main" id="{2333B231-5040-6F38-7FF4-ED471B328F59}"/>
               </a:ext>
             </a:extLst>
           </p:cNvPr>
@@ -1011,7 +1011,7 @@
           <a:bodyPr/>
           <a:lstStyle/>
           <a:p>
-            <a:fld id="{95D83E16-B3B0-4562-9F2C-FEBC5A07F3E0}" type="slidenum">
+            <a:fld id="{48583633-3BA6-4F30-8C90-7AD0190FE42B}" type="slidenum">
               <a:rPr kumimoji="1" lang="ja-JP" altLang="en-US" smtClean="0"/>
               <a:t>‹#›</a:t>
             </a:fld>
@@ -1022,7 +1022,7 @@
     </p:spTree>
     <p:extLst>
       <p:ext uri="{BB962C8B-B14F-4D97-AF65-F5344CB8AC3E}">
-        <p14:creationId xmlns:p14="http://schemas.microsoft.com/office/powerpoint/2010/main" val="438515196"/>
+        <p14:creationId xmlns:p14="http://schemas.microsoft.com/office/powerpoint/2010/main" val="1662200766"/>
       </p:ext>
     </p:extLst>
   </p:cSld>
@@ -1054,7 +1054,7 @@
           <p:cNvPr id="2" name="タイトル 1">
             <a:extLst>
               <a:ext uri="{FF2B5EF4-FFF2-40B4-BE49-F238E27FC236}">
-                <a16:creationId xmlns:a16="http://schemas.microsoft.com/office/drawing/2014/main" id="{07673CC3-380D-A2F3-A2B0-3BFDFB8C1FB4}"/>
+                <a16:creationId xmlns:a16="http://schemas.microsoft.com/office/drawing/2014/main" id="{FEA5773B-5167-A148-4B8E-BA622CBD0294}"/>
               </a:ext>
             </a:extLst>
           </p:cNvPr>
@@ -1091,7 +1091,7 @@
           <p:cNvPr id="3" name="テキスト プレースホルダー 2">
             <a:extLst>
               <a:ext uri="{FF2B5EF4-FFF2-40B4-BE49-F238E27FC236}">
-                <a16:creationId xmlns:a16="http://schemas.microsoft.com/office/drawing/2014/main" id="{7ECEDB02-885C-E531-5AAA-B38C956CD5D8}"/>
+                <a16:creationId xmlns:a16="http://schemas.microsoft.com/office/drawing/2014/main" id="{40E5E650-3A2C-9AE9-F15E-7E69E0DE939A}"/>
               </a:ext>
             </a:extLst>
           </p:cNvPr>
@@ -1216,7 +1216,7 @@
           <p:cNvPr id="4" name="日付プレースホルダー 3">
             <a:extLst>
               <a:ext uri="{FF2B5EF4-FFF2-40B4-BE49-F238E27FC236}">
-                <a16:creationId xmlns:a16="http://schemas.microsoft.com/office/drawing/2014/main" id="{6C40B221-8059-D535-2C62-987BFD6BCD83}"/>
+                <a16:creationId xmlns:a16="http://schemas.microsoft.com/office/drawing/2014/main" id="{79401FC2-0AEE-8755-7F86-12596AADA7A8}"/>
               </a:ext>
             </a:extLst>
           </p:cNvPr>
@@ -1232,7 +1232,7 @@
           <a:bodyPr/>
           <a:lstStyle/>
           <a:p>
-            <a:fld id="{6B460330-058B-41A5-929E-057FBC60E669}" type="datetimeFigureOut">
+            <a:fld id="{6D622BDD-7D80-4750-852E-DC532991A77C}" type="datetimeFigureOut">
               <a:rPr kumimoji="1" lang="ja-JP" altLang="en-US" smtClean="0"/>
               <a:t>2026/7/30</a:t>
             </a:fld>
@@ -1245,7 +1245,7 @@
           <p:cNvPr id="5" name="フッター プレースホルダー 4">
             <a:extLst>
               <a:ext uri="{FF2B5EF4-FFF2-40B4-BE49-F238E27FC236}">
-                <a16:creationId xmlns:a16="http://schemas.microsoft.com/office/drawing/2014/main" id="{DC977791-3C35-829E-40BF-9225E37792A4}"/>
+                <a16:creationId xmlns:a16="http://schemas.microsoft.com/office/drawing/2014/main" id="{6B18C4C8-2A93-47DF-60BE-F63B9086824D}"/>
               </a:ext>
             </a:extLst>
           </p:cNvPr>
@@ -1270,7 +1270,7 @@
           <p:cNvPr id="6" name="スライド番号プレースホルダー 5">
             <a:extLst>
               <a:ext uri="{FF2B5EF4-FFF2-40B4-BE49-F238E27FC236}">
-                <a16:creationId xmlns:a16="http://schemas.microsoft.com/office/drawing/2014/main" id="{46A08166-A76A-2E7A-BB3D-20D89D214E67}"/>
+                <a16:creationId xmlns:a16="http://schemas.microsoft.com/office/drawing/2014/main" id="{776F3C67-46F9-5B66-D59A-3AD6AD24AE90}"/>
               </a:ext>
             </a:extLst>
           </p:cNvPr>
@@ -1286,7 +1286,7 @@
           <a:bodyPr/>
           <a:lstStyle/>
           <a:p>
-            <a:fld id="{95D83E16-B3B0-4562-9F2C-FEBC5A07F3E0}" type="slidenum">
+            <a:fld id="{48583633-3BA6-4F30-8C90-7AD0190FE42B}" type="slidenum">
               <a:rPr kumimoji="1" lang="ja-JP" altLang="en-US" smtClean="0"/>
               <a:t>‹#›</a:t>
             </a:fld>
@@ -1297,7 +1297,7 @@
     </p:spTree>
     <p:extLst>
       <p:ext uri="{BB962C8B-B14F-4D97-AF65-F5344CB8AC3E}">
-        <p14:creationId xmlns:p14="http://schemas.microsoft.com/office/powerpoint/2010/main" val="2386006441"/>
+        <p14:creationId xmlns:p14="http://schemas.microsoft.com/office/powerpoint/2010/main" val="1965697193"/>
       </p:ext>
     </p:extLst>
   </p:cSld>
@@ -1329,7 +1329,7 @@
           <p:cNvPr id="2" name="タイトル 1">
             <a:extLst>
               <a:ext uri="{FF2B5EF4-FFF2-40B4-BE49-F238E27FC236}">
-                <a16:creationId xmlns:a16="http://schemas.microsoft.com/office/drawing/2014/main" id="{20023D63-026C-60E5-79C5-B3B8339A976A}"/>
+                <a16:creationId xmlns:a16="http://schemas.microsoft.com/office/drawing/2014/main" id="{AB6C28CA-1B11-4F9E-B6E8-7C9768067631}"/>
               </a:ext>
             </a:extLst>
           </p:cNvPr>
@@ -1357,7 +1357,7 @@
           <p:cNvPr id="3" name="コンテンツ プレースホルダー 2">
             <a:extLst>
               <a:ext uri="{FF2B5EF4-FFF2-40B4-BE49-F238E27FC236}">
-                <a16:creationId xmlns:a16="http://schemas.microsoft.com/office/drawing/2014/main" id="{40C01EF8-CBBC-1CD7-7ACA-8D765F581024}"/>
+                <a16:creationId xmlns:a16="http://schemas.microsoft.com/office/drawing/2014/main" id="{411AD86D-172B-C736-193B-477755804809}"/>
               </a:ext>
             </a:extLst>
           </p:cNvPr>
@@ -1451,7 +1451,7 @@
           <p:cNvPr id="4" name="コンテンツ プレースホルダー 3">
             <a:extLst>
               <a:ext uri="{FF2B5EF4-FFF2-40B4-BE49-F238E27FC236}">
-                <a16:creationId xmlns:a16="http://schemas.microsoft.com/office/drawing/2014/main" id="{92091B03-F0A5-B74D-CDB3-737FF0E02BD0}"/>
+                <a16:creationId xmlns:a16="http://schemas.microsoft.com/office/drawing/2014/main" id="{DA221CFD-B424-4197-5E9B-0DD6BCC86911}"/>
               </a:ext>
             </a:extLst>
           </p:cNvPr>
@@ -1545,7 +1545,7 @@
           <p:cNvPr id="5" name="日付プレースホルダー 4">
             <a:extLst>
               <a:ext uri="{FF2B5EF4-FFF2-40B4-BE49-F238E27FC236}">
-                <a16:creationId xmlns:a16="http://schemas.microsoft.com/office/drawing/2014/main" id="{0EB194BA-189D-82CD-1175-9130ADEFC4F6}"/>
+                <a16:creationId xmlns:a16="http://schemas.microsoft.com/office/drawing/2014/main" id="{E6EEE6AC-C1AE-D871-EB6E-1F86D73B0AFD}"/>
               </a:ext>
             </a:extLst>
           </p:cNvPr>
@@ -1561,7 +1561,7 @@
           <a:bodyPr/>
           <a:lstStyle/>
           <a:p>
-            <a:fld id="{6B460330-058B-41A5-929E-057FBC60E669}" type="datetimeFigureOut">
+            <a:fld id="{6D622BDD-7D80-4750-852E-DC532991A77C}" type="datetimeFigureOut">
               <a:rPr kumimoji="1" lang="ja-JP" altLang="en-US" smtClean="0"/>
               <a:t>2026/7/30</a:t>
             </a:fld>
@@ -1574,7 +1574,7 @@
           <p:cNvPr id="6" name="フッター プレースホルダー 5">
             <a:extLst>
               <a:ext uri="{FF2B5EF4-FFF2-40B4-BE49-F238E27FC236}">
-                <a16:creationId xmlns:a16="http://schemas.microsoft.com/office/drawing/2014/main" id="{C75EB085-925F-CABD-498E-DC7FA5CFBAA5}"/>
+                <a16:creationId xmlns:a16="http://schemas.microsoft.com/office/drawing/2014/main" id="{45BA52C6-372C-E3DF-090E-4136E8B51E95}"/>
               </a:ext>
             </a:extLst>
           </p:cNvPr>
@@ -1599,7 +1599,7 @@
           <p:cNvPr id="7" name="スライド番号プレースホルダー 6">
             <a:extLst>
               <a:ext uri="{FF2B5EF4-FFF2-40B4-BE49-F238E27FC236}">
-                <a16:creationId xmlns:a16="http://schemas.microsoft.com/office/drawing/2014/main" id="{7895B5F3-B1D1-3473-30D0-E8335C1BF276}"/>
+                <a16:creationId xmlns:a16="http://schemas.microsoft.com/office/drawing/2014/main" id="{F0ABB552-CDD7-9D5B-CF2D-305C0117ED98}"/>
               </a:ext>
             </a:extLst>
           </p:cNvPr>
@@ -1615,7 +1615,7 @@
           <a:bodyPr/>
           <a:lstStyle/>
           <a:p>
-            <a:fld id="{95D83E16-B3B0-4562-9F2C-FEBC5A07F3E0}" type="slidenum">
+            <a:fld id="{48583633-3BA6-4F30-8C90-7AD0190FE42B}" type="slidenum">
               <a:rPr kumimoji="1" lang="ja-JP" altLang="en-US" smtClean="0"/>
               <a:t>‹#›</a:t>
             </a:fld>
@@ -1626,7 +1626,7 @@
     </p:spTree>
     <p:extLst>
       <p:ext uri="{BB962C8B-B14F-4D97-AF65-F5344CB8AC3E}">
-        <p14:creationId xmlns:p14="http://schemas.microsoft.com/office/powerpoint/2010/main" val="265014866"/>
+        <p14:creationId xmlns:p14="http://schemas.microsoft.com/office/powerpoint/2010/main" val="3180807554"/>
       </p:ext>
     </p:extLst>
   </p:cSld>
@@ -1658,7 +1658,7 @@
           <p:cNvPr id="2" name="タイトル 1">
             <a:extLst>
               <a:ext uri="{FF2B5EF4-FFF2-40B4-BE49-F238E27FC236}">
-                <a16:creationId xmlns:a16="http://schemas.microsoft.com/office/drawing/2014/main" id="{AF577235-9D50-AC65-FA49-1F0E41ECBEEF}"/>
+                <a16:creationId xmlns:a16="http://schemas.microsoft.com/office/drawing/2014/main" id="{FF0C4390-7E3D-5DB0-AD1A-8C1C3942B723}"/>
               </a:ext>
             </a:extLst>
           </p:cNvPr>
@@ -1691,7 +1691,7 @@
           <p:cNvPr id="3" name="テキスト プレースホルダー 2">
             <a:extLst>
               <a:ext uri="{FF2B5EF4-FFF2-40B4-BE49-F238E27FC236}">
-                <a16:creationId xmlns:a16="http://schemas.microsoft.com/office/drawing/2014/main" id="{6E49B8FB-CE44-DDF6-61D5-187CBA251AC3}"/>
+                <a16:creationId xmlns:a16="http://schemas.microsoft.com/office/drawing/2014/main" id="{A4653F31-D079-A808-E677-B293AE94AAD8}"/>
               </a:ext>
             </a:extLst>
           </p:cNvPr>
@@ -1762,7 +1762,7 @@
           <p:cNvPr id="4" name="コンテンツ プレースホルダー 3">
             <a:extLst>
               <a:ext uri="{FF2B5EF4-FFF2-40B4-BE49-F238E27FC236}">
-                <a16:creationId xmlns:a16="http://schemas.microsoft.com/office/drawing/2014/main" id="{CF23B56B-5898-B17A-BFD4-A67BDF840B56}"/>
+                <a16:creationId xmlns:a16="http://schemas.microsoft.com/office/drawing/2014/main" id="{959DC534-7ED4-8604-F9D4-D51FDB7E0C7A}"/>
               </a:ext>
             </a:extLst>
           </p:cNvPr>
@@ -1856,7 +1856,7 @@
           <p:cNvPr id="5" name="テキスト プレースホルダー 4">
             <a:extLst>
               <a:ext uri="{FF2B5EF4-FFF2-40B4-BE49-F238E27FC236}">
-                <a16:creationId xmlns:a16="http://schemas.microsoft.com/office/drawing/2014/main" id="{BECAF0DF-54C7-D89C-A950-5257090269AB}"/>
+                <a16:creationId xmlns:a16="http://schemas.microsoft.com/office/drawing/2014/main" id="{9186FF1F-A114-7EA1-D023-2C2056D8CFAA}"/>
               </a:ext>
             </a:extLst>
           </p:cNvPr>
@@ -1927,7 +1927,7 @@
           <p:cNvPr id="6" name="コンテンツ プレースホルダー 5">
             <a:extLst>
               <a:ext uri="{FF2B5EF4-FFF2-40B4-BE49-F238E27FC236}">
-                <a16:creationId xmlns:a16="http://schemas.microsoft.com/office/drawing/2014/main" id="{CD962FB0-60D1-31C1-1F34-6E7BDFF9422B}"/>
+                <a16:creationId xmlns:a16="http://schemas.microsoft.com/office/drawing/2014/main" id="{991C1321-E11E-63E0-7CE7-182589FB0E0D}"/>
               </a:ext>
             </a:extLst>
           </p:cNvPr>
@@ -2021,7 +2021,7 @@
           <p:cNvPr id="7" name="日付プレースホルダー 6">
             <a:extLst>
               <a:ext uri="{FF2B5EF4-FFF2-40B4-BE49-F238E27FC236}">
-                <a16:creationId xmlns:a16="http://schemas.microsoft.com/office/drawing/2014/main" id="{848A845B-3594-7713-5EE0-6C1AD5CD66FA}"/>
+                <a16:creationId xmlns:a16="http://schemas.microsoft.com/office/drawing/2014/main" id="{0FBC511E-F7D9-70A0-2A0D-7C708C27DCD5}"/>
               </a:ext>
             </a:extLst>
           </p:cNvPr>
@@ -2037,7 +2037,7 @@
           <a:bodyPr/>
           <a:lstStyle/>
           <a:p>
-            <a:fld id="{6B460330-058B-41A5-929E-057FBC60E669}" type="datetimeFigureOut">
+            <a:fld id="{6D622BDD-7D80-4750-852E-DC532991A77C}" type="datetimeFigureOut">
               <a:rPr kumimoji="1" lang="ja-JP" altLang="en-US" smtClean="0"/>
               <a:t>2026/7/30</a:t>
             </a:fld>
@@ -2050,7 +2050,7 @@
           <p:cNvPr id="8" name="フッター プレースホルダー 7">
             <a:extLst>
               <a:ext uri="{FF2B5EF4-FFF2-40B4-BE49-F238E27FC236}">
-                <a16:creationId xmlns:a16="http://schemas.microsoft.com/office/drawing/2014/main" id="{FD68B388-2E92-0D7D-ACC4-AA83EDF91557}"/>
+                <a16:creationId xmlns:a16="http://schemas.microsoft.com/office/drawing/2014/main" id="{A80AEE7E-8BCD-73C9-E692-9063A6692C22}"/>
               </a:ext>
             </a:extLst>
           </p:cNvPr>
@@ -2075,7 +2075,7 @@
           <p:cNvPr id="9" name="スライド番号プレースホルダー 8">
             <a:extLst>
               <a:ext uri="{FF2B5EF4-FFF2-40B4-BE49-F238E27FC236}">
-                <a16:creationId xmlns:a16="http://schemas.microsoft.com/office/drawing/2014/main" id="{94121062-9F05-0D12-4AA0-C548BAAB5B21}"/>
+                <a16:creationId xmlns:a16="http://schemas.microsoft.com/office/drawing/2014/main" id="{34B78FCC-207E-649D-3675-DA9BB98B2BC1}"/>
               </a:ext>
             </a:extLst>
           </p:cNvPr>
@@ -2091,7 +2091,7 @@
           <a:bodyPr/>
           <a:lstStyle/>
           <a:p>
-            <a:fld id="{95D83E16-B3B0-4562-9F2C-FEBC5A07F3E0}" type="slidenum">
+            <a:fld id="{48583633-3BA6-4F30-8C90-7AD0190FE42B}" type="slidenum">
               <a:rPr kumimoji="1" lang="ja-JP" altLang="en-US" smtClean="0"/>
               <a:t>‹#›</a:t>
             </a:fld>
@@ -2102,7 +2102,7 @@
     </p:spTree>
     <p:extLst>
       <p:ext uri="{BB962C8B-B14F-4D97-AF65-F5344CB8AC3E}">
-        <p14:creationId xmlns:p14="http://schemas.microsoft.com/office/powerpoint/2010/main" val="3355808685"/>
+        <p14:creationId xmlns:p14="http://schemas.microsoft.com/office/powerpoint/2010/main" val="1257920349"/>
       </p:ext>
     </p:extLst>
   </p:cSld>
@@ -2134,7 +2134,7 @@
           <p:cNvPr id="2" name="タイトル 1">
             <a:extLst>
               <a:ext uri="{FF2B5EF4-FFF2-40B4-BE49-F238E27FC236}">
-                <a16:creationId xmlns:a16="http://schemas.microsoft.com/office/drawing/2014/main" id="{AE3A3423-F77E-6518-4568-C95B1FCC86FE}"/>
+                <a16:creationId xmlns:a16="http://schemas.microsoft.com/office/drawing/2014/main" id="{8A880020-57E3-AAB5-192D-E8AF573CC542}"/>
               </a:ext>
             </a:extLst>
           </p:cNvPr>
@@ -2162,7 +2162,7 @@
           <p:cNvPr id="3" name="日付プレースホルダー 2">
             <a:extLst>
               <a:ext uri="{FF2B5EF4-FFF2-40B4-BE49-F238E27FC236}">
-                <a16:creationId xmlns:a16="http://schemas.microsoft.com/office/drawing/2014/main" id="{1ED322C0-3112-2D31-AF52-40714C24218E}"/>
+                <a16:creationId xmlns:a16="http://schemas.microsoft.com/office/drawing/2014/main" id="{534859C8-EBF4-8379-D4E9-D59309CC6B73}"/>
               </a:ext>
             </a:extLst>
           </p:cNvPr>
@@ -2178,7 +2178,7 @@
           <a:bodyPr/>
           <a:lstStyle/>
           <a:p>
-            <a:fld id="{6B460330-058B-41A5-929E-057FBC60E669}" type="datetimeFigureOut">
+            <a:fld id="{6D622BDD-7D80-4750-852E-DC532991A77C}" type="datetimeFigureOut">
               <a:rPr kumimoji="1" lang="ja-JP" altLang="en-US" smtClean="0"/>
               <a:t>2026/7/30</a:t>
             </a:fld>
@@ -2191,7 +2191,7 @@
           <p:cNvPr id="4" name="フッター プレースホルダー 3">
             <a:extLst>
               <a:ext uri="{FF2B5EF4-FFF2-40B4-BE49-F238E27FC236}">
-                <a16:creationId xmlns:a16="http://schemas.microsoft.com/office/drawing/2014/main" id="{FB4758CC-B78F-3D49-6BFC-4E73F7FBF376}"/>
+                <a16:creationId xmlns:a16="http://schemas.microsoft.com/office/drawing/2014/main" id="{D2DC7825-CD0E-1C08-0E1F-2FE01FE52091}"/>
               </a:ext>
             </a:extLst>
           </p:cNvPr>
@@ -2216,7 +2216,7 @@
           <p:cNvPr id="5" name="スライド番号プレースホルダー 4">
             <a:extLst>
               <a:ext uri="{FF2B5EF4-FFF2-40B4-BE49-F238E27FC236}">
-                <a16:creationId xmlns:a16="http://schemas.microsoft.com/office/drawing/2014/main" id="{53198133-8F51-1212-2315-DE6637D44240}"/>
+                <a16:creationId xmlns:a16="http://schemas.microsoft.com/office/drawing/2014/main" id="{3DEA8FF0-8AB7-141B-6DC6-98AFA0339205}"/>
               </a:ext>
             </a:extLst>
           </p:cNvPr>
@@ -2232,7 +2232,7 @@
           <a:bodyPr/>
           <a:lstStyle/>
           <a:p>
-            <a:fld id="{95D83E16-B3B0-4562-9F2C-FEBC5A07F3E0}" type="slidenum">
+            <a:fld id="{48583633-3BA6-4F30-8C90-7AD0190FE42B}" type="slidenum">
               <a:rPr kumimoji="1" lang="ja-JP" altLang="en-US" smtClean="0"/>
               <a:t>‹#›</a:t>
             </a:fld>
@@ -2243,7 +2243,7 @@
     </p:spTree>
     <p:extLst>
       <p:ext uri="{BB962C8B-B14F-4D97-AF65-F5344CB8AC3E}">
-        <p14:creationId xmlns:p14="http://schemas.microsoft.com/office/powerpoint/2010/main" val="1472358718"/>
+        <p14:creationId xmlns:p14="http://schemas.microsoft.com/office/powerpoint/2010/main" val="1234057059"/>
       </p:ext>
     </p:extLst>
   </p:cSld>
@@ -2275,7 +2275,7 @@
           <p:cNvPr id="2" name="日付プレースホルダー 1">
             <a:extLst>
               <a:ext uri="{FF2B5EF4-FFF2-40B4-BE49-F238E27FC236}">
-                <a16:creationId xmlns:a16="http://schemas.microsoft.com/office/drawing/2014/main" id="{9F3FFD7C-8E73-8AC6-EC71-BC3C6A219353}"/>
+                <a16:creationId xmlns:a16="http://schemas.microsoft.com/office/drawing/2014/main" id="{D5B0C4CB-08B8-611C-3BFD-46EEDA391677}"/>
               </a:ext>
             </a:extLst>
           </p:cNvPr>
@@ -2291,7 +2291,7 @@
           <a:bodyPr/>
           <a:lstStyle/>
           <a:p>
-            <a:fld id="{6B460330-058B-41A5-929E-057FBC60E669}" type="datetimeFigureOut">
+            <a:fld id="{6D622BDD-7D80-4750-852E-DC532991A77C}" type="datetimeFigureOut">
               <a:rPr kumimoji="1" lang="ja-JP" altLang="en-US" smtClean="0"/>
               <a:t>2026/7/30</a:t>
             </a:fld>
@@ -2304,7 +2304,7 @@
           <p:cNvPr id="3" name="フッター プレースホルダー 2">
             <a:extLst>
               <a:ext uri="{FF2B5EF4-FFF2-40B4-BE49-F238E27FC236}">
-                <a16:creationId xmlns:a16="http://schemas.microsoft.com/office/drawing/2014/main" id="{9A8DCE44-B996-6C34-D104-19BB71CF1086}"/>
+                <a16:creationId xmlns:a16="http://schemas.microsoft.com/office/drawing/2014/main" id="{7C5A3FB5-2951-B61D-E24C-D293234A6CC2}"/>
               </a:ext>
             </a:extLst>
           </p:cNvPr>
@@ -2329,7 +2329,7 @@
           <p:cNvPr id="4" name="スライド番号プレースホルダー 3">
             <a:extLst>
               <a:ext uri="{FF2B5EF4-FFF2-40B4-BE49-F238E27FC236}">
-                <a16:creationId xmlns:a16="http://schemas.microsoft.com/office/drawing/2014/main" id="{B2887760-39DC-1F0B-6B7D-71A6D5A0F94B}"/>
+                <a16:creationId xmlns:a16="http://schemas.microsoft.com/office/drawing/2014/main" id="{B71AB4B4-54A6-8047-00C2-6259782C2FD8}"/>
               </a:ext>
             </a:extLst>
           </p:cNvPr>
@@ -2345,7 +2345,7 @@
           <a:bodyPr/>
           <a:lstStyle/>
           <a:p>
-            <a:fld id="{95D83E16-B3B0-4562-9F2C-FEBC5A07F3E0}" type="slidenum">
+            <a:fld id="{48583633-3BA6-4F30-8C90-7AD0190FE42B}" type="slidenum">
               <a:rPr kumimoji="1" lang="ja-JP" altLang="en-US" smtClean="0"/>
               <a:t>‹#›</a:t>
             </a:fld>
@@ -2356,7 +2356,7 @@
     </p:spTree>
     <p:extLst>
       <p:ext uri="{BB962C8B-B14F-4D97-AF65-F5344CB8AC3E}">
-        <p14:creationId xmlns:p14="http://schemas.microsoft.com/office/powerpoint/2010/main" val="3902306502"/>
+        <p14:creationId xmlns:p14="http://schemas.microsoft.com/office/powerpoint/2010/main" val="2587150965"/>
       </p:ext>
     </p:extLst>
   </p:cSld>
@@ -2388,7 +2388,7 @@
           <p:cNvPr id="2" name="タイトル 1">
             <a:extLst>
               <a:ext uri="{FF2B5EF4-FFF2-40B4-BE49-F238E27FC236}">
-                <a16:creationId xmlns:a16="http://schemas.microsoft.com/office/drawing/2014/main" id="{5D2F0312-7B05-1F95-D119-B6368BB15AAD}"/>
+                <a16:creationId xmlns:a16="http://schemas.microsoft.com/office/drawing/2014/main" id="{5FDF737A-FD07-BA35-E1E1-EFDA28E7946A}"/>
               </a:ext>
             </a:extLst>
           </p:cNvPr>
@@ -2425,7 +2425,7 @@
           <p:cNvPr id="3" name="コンテンツ プレースホルダー 2">
             <a:extLst>
               <a:ext uri="{FF2B5EF4-FFF2-40B4-BE49-F238E27FC236}">
-                <a16:creationId xmlns:a16="http://schemas.microsoft.com/office/drawing/2014/main" id="{66EF521D-EB65-16BD-F1C6-07984A944A09}"/>
+                <a16:creationId xmlns:a16="http://schemas.microsoft.com/office/drawing/2014/main" id="{A7F34FBB-BFFF-2071-74DF-7A5DA34B4A15}"/>
               </a:ext>
             </a:extLst>
           </p:cNvPr>
@@ -2547,7 +2547,7 @@
           <p:cNvPr id="4" name="テキスト プレースホルダー 3">
             <a:extLst>
               <a:ext uri="{FF2B5EF4-FFF2-40B4-BE49-F238E27FC236}">
-                <a16:creationId xmlns:a16="http://schemas.microsoft.com/office/drawing/2014/main" id="{F426086F-6853-D8B5-14E0-37978D682AAB}"/>
+                <a16:creationId xmlns:a16="http://schemas.microsoft.com/office/drawing/2014/main" id="{0E97FE0D-873E-673D-498B-7D6488374888}"/>
               </a:ext>
             </a:extLst>
           </p:cNvPr>
@@ -2618,7 +2618,7 @@
           <p:cNvPr id="5" name="日付プレースホルダー 4">
             <a:extLst>
               <a:ext uri="{FF2B5EF4-FFF2-40B4-BE49-F238E27FC236}">
-                <a16:creationId xmlns:a16="http://schemas.microsoft.com/office/drawing/2014/main" id="{21A5BC1B-DE66-AFFA-4325-4B4F38940FB6}"/>
+                <a16:creationId xmlns:a16="http://schemas.microsoft.com/office/drawing/2014/main" id="{B22FFE2B-94BD-B8B9-A00E-77A91E84C2CE}"/>
               </a:ext>
             </a:extLst>
           </p:cNvPr>
@@ -2634,7 +2634,7 @@
           <a:bodyPr/>
           <a:lstStyle/>
           <a:p>
-            <a:fld id="{6B460330-058B-41A5-929E-057FBC60E669}" type="datetimeFigureOut">
+            <a:fld id="{6D622BDD-7D80-4750-852E-DC532991A77C}" type="datetimeFigureOut">
               <a:rPr kumimoji="1" lang="ja-JP" altLang="en-US" smtClean="0"/>
               <a:t>2026/7/30</a:t>
             </a:fld>
@@ -2647,7 +2647,7 @@
           <p:cNvPr id="6" name="フッター プレースホルダー 5">
             <a:extLst>
               <a:ext uri="{FF2B5EF4-FFF2-40B4-BE49-F238E27FC236}">
-                <a16:creationId xmlns:a16="http://schemas.microsoft.com/office/drawing/2014/main" id="{2CF486F5-35DE-E6CF-9645-36C009472D15}"/>
+                <a16:creationId xmlns:a16="http://schemas.microsoft.com/office/drawing/2014/main" id="{59298519-F465-318D-C578-6B1647B13727}"/>
               </a:ext>
             </a:extLst>
           </p:cNvPr>
@@ -2672,7 +2672,7 @@
           <p:cNvPr id="7" name="スライド番号プレースホルダー 6">
             <a:extLst>
               <a:ext uri="{FF2B5EF4-FFF2-40B4-BE49-F238E27FC236}">
-                <a16:creationId xmlns:a16="http://schemas.microsoft.com/office/drawing/2014/main" id="{46224184-A268-6332-6EDA-16F42324D022}"/>
+                <a16:creationId xmlns:a16="http://schemas.microsoft.com/office/drawing/2014/main" id="{02C2D6F6-2E09-AEAF-3211-F7A4D7179FA5}"/>
               </a:ext>
             </a:extLst>
           </p:cNvPr>
@@ -2688,7 +2688,7 @@
           <a:bodyPr/>
           <a:lstStyle/>
           <a:p>
-            <a:fld id="{95D83E16-B3B0-4562-9F2C-FEBC5A07F3E0}" type="slidenum">
+            <a:fld id="{48583633-3BA6-4F30-8C90-7AD0190FE42B}" type="slidenum">
               <a:rPr kumimoji="1" lang="ja-JP" altLang="en-US" smtClean="0"/>
               <a:t>‹#›</a:t>
             </a:fld>
@@ -2699,7 +2699,7 @@
     </p:spTree>
     <p:extLst>
       <p:ext uri="{BB962C8B-B14F-4D97-AF65-F5344CB8AC3E}">
-        <p14:creationId xmlns:p14="http://schemas.microsoft.com/office/powerpoint/2010/main" val="3519080151"/>
+        <p14:creationId xmlns:p14="http://schemas.microsoft.com/office/powerpoint/2010/main" val="3092723334"/>
       </p:ext>
     </p:extLst>
   </p:cSld>
@@ -2731,7 +2731,7 @@
           <p:cNvPr id="2" name="タイトル 1">
             <a:extLst>
               <a:ext uri="{FF2B5EF4-FFF2-40B4-BE49-F238E27FC236}">
-                <a16:creationId xmlns:a16="http://schemas.microsoft.com/office/drawing/2014/main" id="{A6384A2E-CFB2-E9D6-9585-2438C7F3BDFD}"/>
+                <a16:creationId xmlns:a16="http://schemas.microsoft.com/office/drawing/2014/main" id="{8C570230-0C1D-99CF-6668-9DF3E62C8C53}"/>
               </a:ext>
             </a:extLst>
           </p:cNvPr>
@@ -2768,7 +2768,7 @@
           <p:cNvPr id="3" name="図プレースホルダー 2">
             <a:extLst>
               <a:ext uri="{FF2B5EF4-FFF2-40B4-BE49-F238E27FC236}">
-                <a16:creationId xmlns:a16="http://schemas.microsoft.com/office/drawing/2014/main" id="{95D115FA-38D1-2D0A-8FF9-772DCB03E041}"/>
+                <a16:creationId xmlns:a16="http://schemas.microsoft.com/office/drawing/2014/main" id="{E752A77F-3460-D781-23CE-557710570405}"/>
               </a:ext>
             </a:extLst>
           </p:cNvPr>
@@ -2835,7 +2835,7 @@
           <p:cNvPr id="4" name="テキスト プレースホルダー 3">
             <a:extLst>
               <a:ext uri="{FF2B5EF4-FFF2-40B4-BE49-F238E27FC236}">
-                <a16:creationId xmlns:a16="http://schemas.microsoft.com/office/drawing/2014/main" id="{31953229-ABE0-A671-AD3D-506CDFB33516}"/>
+                <a16:creationId xmlns:a16="http://schemas.microsoft.com/office/drawing/2014/main" id="{EE22D39C-C157-7202-D2A4-E5FC04EBA0B5}"/>
               </a:ext>
             </a:extLst>
           </p:cNvPr>
@@ -2906,7 +2906,7 @@
           <p:cNvPr id="5" name="日付プレースホルダー 4">
             <a:extLst>
               <a:ext uri="{FF2B5EF4-FFF2-40B4-BE49-F238E27FC236}">
-                <a16:creationId xmlns:a16="http://schemas.microsoft.com/office/drawing/2014/main" id="{6394F176-0E2D-F170-8CED-D192BA4CBBA6}"/>
+                <a16:creationId xmlns:a16="http://schemas.microsoft.com/office/drawing/2014/main" id="{00A3C70A-1812-4EDB-BC07-A0DFCCE76ADB}"/>
               </a:ext>
             </a:extLst>
           </p:cNvPr>
@@ -2922,7 +2922,7 @@
           <a:bodyPr/>
           <a:lstStyle/>
           <a:p>
-            <a:fld id="{6B460330-058B-41A5-929E-057FBC60E669}" type="datetimeFigureOut">
+            <a:fld id="{6D622BDD-7D80-4750-852E-DC532991A77C}" type="datetimeFigureOut">
               <a:rPr kumimoji="1" lang="ja-JP" altLang="en-US" smtClean="0"/>
               <a:t>2026/7/30</a:t>
             </a:fld>
@@ -2935,7 +2935,7 @@
           <p:cNvPr id="6" name="フッター プレースホルダー 5">
             <a:extLst>
               <a:ext uri="{FF2B5EF4-FFF2-40B4-BE49-F238E27FC236}">
-                <a16:creationId xmlns:a16="http://schemas.microsoft.com/office/drawing/2014/main" id="{33159E3A-5ACB-F778-D621-0927ABD32374}"/>
+                <a16:creationId xmlns:a16="http://schemas.microsoft.com/office/drawing/2014/main" id="{4295B99D-8291-28EF-C5B2-23A4AEF89A82}"/>
               </a:ext>
             </a:extLst>
           </p:cNvPr>
@@ -2960,7 +2960,7 @@
           <p:cNvPr id="7" name="スライド番号プレースホルダー 6">
             <a:extLst>
               <a:ext uri="{FF2B5EF4-FFF2-40B4-BE49-F238E27FC236}">
-                <a16:creationId xmlns:a16="http://schemas.microsoft.com/office/drawing/2014/main" id="{91FC3FB2-7DC4-E946-04FD-79193378CA49}"/>
+                <a16:creationId xmlns:a16="http://schemas.microsoft.com/office/drawing/2014/main" id="{65718D54-D2F5-A4EB-4701-5FD44A125D5C}"/>
               </a:ext>
             </a:extLst>
           </p:cNvPr>
@@ -2976,7 +2976,7 @@
           <a:bodyPr/>
           <a:lstStyle/>
           <a:p>
-            <a:fld id="{95D83E16-B3B0-4562-9F2C-FEBC5A07F3E0}" type="slidenum">
+            <a:fld id="{48583633-3BA6-4F30-8C90-7AD0190FE42B}" type="slidenum">
               <a:rPr kumimoji="1" lang="ja-JP" altLang="en-US" smtClean="0"/>
               <a:t>‹#›</a:t>
             </a:fld>
@@ -2987,7 +2987,7 @@
     </p:spTree>
     <p:extLst>
       <p:ext uri="{BB962C8B-B14F-4D97-AF65-F5344CB8AC3E}">
-        <p14:creationId xmlns:p14="http://schemas.microsoft.com/office/powerpoint/2010/main" val="1490809214"/>
+        <p14:creationId xmlns:p14="http://schemas.microsoft.com/office/powerpoint/2010/main" val="2554356192"/>
       </p:ext>
     </p:extLst>
   </p:cSld>
@@ -3024,7 +3024,7 @@
           <p:cNvPr id="2" name="タイトル プレースホルダー 1">
             <a:extLst>
               <a:ext uri="{FF2B5EF4-FFF2-40B4-BE49-F238E27FC236}">
-                <a16:creationId xmlns:a16="http://schemas.microsoft.com/office/drawing/2014/main" id="{A6D3EF86-F8AD-1A48-A12E-C2CB84A5BA21}"/>
+                <a16:creationId xmlns:a16="http://schemas.microsoft.com/office/drawing/2014/main" id="{D01E71A2-C780-D65C-5E59-9FCA5FB155D9}"/>
               </a:ext>
             </a:extLst>
           </p:cNvPr>
@@ -3062,7 +3062,7 @@
           <p:cNvPr id="3" name="テキスト プレースホルダー 2">
             <a:extLst>
               <a:ext uri="{FF2B5EF4-FFF2-40B4-BE49-F238E27FC236}">
-                <a16:creationId xmlns:a16="http://schemas.microsoft.com/office/drawing/2014/main" id="{E883261D-EB4F-BDB9-5F51-5C4B1D7C076D}"/>
+                <a16:creationId xmlns:a16="http://schemas.microsoft.com/office/drawing/2014/main" id="{C1C9398F-57F5-C875-DC99-F3C24FEBB1AC}"/>
               </a:ext>
             </a:extLst>
           </p:cNvPr>
@@ -3161,7 +3161,7 @@
           <p:cNvPr id="4" name="日付プレースホルダー 3">
             <a:extLst>
               <a:ext uri="{FF2B5EF4-FFF2-40B4-BE49-F238E27FC236}">
-                <a16:creationId xmlns:a16="http://schemas.microsoft.com/office/drawing/2014/main" id="{ED41487D-8414-96CB-6DDA-3757D4C6D627}"/>
+                <a16:creationId xmlns:a16="http://schemas.microsoft.com/office/drawing/2014/main" id="{07F06F27-3A58-7944-B495-C6413A0D1AF7}"/>
               </a:ext>
             </a:extLst>
           </p:cNvPr>
@@ -3195,7 +3195,7 @@
             </a:lvl1pPr>
           </a:lstStyle>
           <a:p>
-            <a:fld id="{6B460330-058B-41A5-929E-057FBC60E669}" type="datetimeFigureOut">
+            <a:fld id="{6D622BDD-7D80-4750-852E-DC532991A77C}" type="datetimeFigureOut">
               <a:rPr kumimoji="1" lang="ja-JP" altLang="en-US" smtClean="0"/>
               <a:t>2026/7/30</a:t>
             </a:fld>
@@ -3208,7 +3208,7 @@
           <p:cNvPr id="5" name="フッター プレースホルダー 4">
             <a:extLst>
               <a:ext uri="{FF2B5EF4-FFF2-40B4-BE49-F238E27FC236}">
-                <a16:creationId xmlns:a16="http://schemas.microsoft.com/office/drawing/2014/main" id="{7AA47160-B1E4-A96F-5764-8A1BA7AD1E44}"/>
+                <a16:creationId xmlns:a16="http://schemas.microsoft.com/office/drawing/2014/main" id="{981886EC-AC04-6A39-7846-E3D8F320F1DA}"/>
               </a:ext>
             </a:extLst>
           </p:cNvPr>
@@ -3251,7 +3251,7 @@
           <p:cNvPr id="6" name="スライド番号プレースホルダー 5">
             <a:extLst>
               <a:ext uri="{FF2B5EF4-FFF2-40B4-BE49-F238E27FC236}">
-                <a16:creationId xmlns:a16="http://schemas.microsoft.com/office/drawing/2014/main" id="{FC254B10-A7B4-0C23-8ED6-02D0C7D0F2FF}"/>
+                <a16:creationId xmlns:a16="http://schemas.microsoft.com/office/drawing/2014/main" id="{A96F5326-7F11-AC80-765E-8A9CF3F5F88C}"/>
               </a:ext>
             </a:extLst>
           </p:cNvPr>
@@ -3285,7 +3285,7 @@
             </a:lvl1pPr>
           </a:lstStyle>
           <a:p>
-            <a:fld id="{95D83E16-B3B0-4562-9F2C-FEBC5A07F3E0}" type="slidenum">
+            <a:fld id="{48583633-3BA6-4F30-8C90-7AD0190FE42B}" type="slidenum">
               <a:rPr kumimoji="1" lang="ja-JP" altLang="en-US" smtClean="0"/>
               <a:t>‹#›</a:t>
             </a:fld>
@@ -3296,7 +3296,7 @@
     </p:spTree>
     <p:extLst>
       <p:ext uri="{BB962C8B-B14F-4D97-AF65-F5344CB8AC3E}">
-        <p14:creationId xmlns:p14="http://schemas.microsoft.com/office/powerpoint/2010/main" val="500055184"/>
+        <p14:creationId xmlns:p14="http://schemas.microsoft.com/office/powerpoint/2010/main" val="3179456352"/>
       </p:ext>
     </p:extLst>
   </p:cSld>
@@ -3619,7 +3619,7 @@
           <p:cNvPr id="2" name="テキスト ボックス 1">
             <a:extLst>
               <a:ext uri="{FF2B5EF4-FFF2-40B4-BE49-F238E27FC236}">
-                <a16:creationId xmlns:a16="http://schemas.microsoft.com/office/drawing/2014/main" id="{83467139-DCDD-F349-37C6-B65025309CA8}"/>
+                <a16:creationId xmlns:a16="http://schemas.microsoft.com/office/drawing/2014/main" id="{C4CAF192-697C-0128-DC54-E853305BD17B}"/>
               </a:ext>
             </a:extLst>
           </p:cNvPr>
@@ -3665,7 +3665,7 @@
           <p:cNvPr id="3" name="テキスト ボックス 2">
             <a:extLst>
               <a:ext uri="{FF2B5EF4-FFF2-40B4-BE49-F238E27FC236}">
-                <a16:creationId xmlns:a16="http://schemas.microsoft.com/office/drawing/2014/main" id="{3BFFE1F7-3906-FF9E-BF2E-3290FA8BBD9F}"/>
+                <a16:creationId xmlns:a16="http://schemas.microsoft.com/office/drawing/2014/main" id="{2E97F9F1-4333-026C-9703-1EC81FB06E18}"/>
               </a:ext>
             </a:extLst>
           </p:cNvPr>
@@ -3714,7 +3714,7 @@
           <p:cNvPr id="4" name="テキスト ボックス 3">
             <a:extLst>
               <a:ext uri="{FF2B5EF4-FFF2-40B4-BE49-F238E27FC236}">
-                <a16:creationId xmlns:a16="http://schemas.microsoft.com/office/drawing/2014/main" id="{F22BE777-31E6-2D5B-CEBC-42C64844C730}"/>
+                <a16:creationId xmlns:a16="http://schemas.microsoft.com/office/drawing/2014/main" id="{FB326E0A-6167-15B8-6460-F1FDF9805850}"/>
               </a:ext>
             </a:extLst>
           </p:cNvPr>
@@ -3754,7 +3754,7 @@
           <p:cNvPr id="5" name="テキスト ボックス 4">
             <a:extLst>
               <a:ext uri="{FF2B5EF4-FFF2-40B4-BE49-F238E27FC236}">
-                <a16:creationId xmlns:a16="http://schemas.microsoft.com/office/drawing/2014/main" id="{3CCEB4C2-A64C-A966-6B2A-458ADFAEB877}"/>
+                <a16:creationId xmlns:a16="http://schemas.microsoft.com/office/drawing/2014/main" id="{F1E1C029-55FE-BBBA-D5CD-52EBB280972B}"/>
               </a:ext>
             </a:extLst>
           </p:cNvPr>
@@ -3801,7 +3801,7 @@
             <a:hlinkClick r:id="" action="ppaction://media"/>
             <a:extLst>
               <a:ext uri="{FF2B5EF4-FFF2-40B4-BE49-F238E27FC236}">
-                <a16:creationId xmlns:a16="http://schemas.microsoft.com/office/drawing/2014/main" id="{66491CAB-569E-F8AE-5708-127719C8A916}"/>
+                <a16:creationId xmlns:a16="http://schemas.microsoft.com/office/drawing/2014/main" id="{E85D50B5-7494-5166-5DD2-49DEC51A2D0C}"/>
               </a:ext>
             </a:extLst>
           </p:cNvPr>
@@ -3836,7 +3836,7 @@
     </p:spTree>
     <p:extLst>
       <p:ext uri="{BB962C8B-B14F-4D97-AF65-F5344CB8AC3E}">
-        <p14:creationId xmlns:p14="http://schemas.microsoft.com/office/powerpoint/2010/main" val="2859451191"/>
+        <p14:creationId xmlns:p14="http://schemas.microsoft.com/office/powerpoint/2010/main" val="3885720090"/>
       </p:ext>
     </p:extLst>
   </p:cSld>
@@ -3960,7 +3960,7 @@
           <p:cNvPr id="2" name="テキスト ボックス 1">
             <a:extLst>
               <a:ext uri="{FF2B5EF4-FFF2-40B4-BE49-F238E27FC236}">
-                <a16:creationId xmlns:a16="http://schemas.microsoft.com/office/drawing/2014/main" id="{83A833D8-90BA-B5EF-241C-F68C2DCC58FB}"/>
+                <a16:creationId xmlns:a16="http://schemas.microsoft.com/office/drawing/2014/main" id="{6A67450C-0CAA-2661-F53B-C4AA53D5DF48}"/>
               </a:ext>
             </a:extLst>
           </p:cNvPr>
@@ -4006,7 +4006,7 @@
           <p:cNvPr id="3" name="テキスト ボックス 2">
             <a:extLst>
               <a:ext uri="{FF2B5EF4-FFF2-40B4-BE49-F238E27FC236}">
-                <a16:creationId xmlns:a16="http://schemas.microsoft.com/office/drawing/2014/main" id="{ABBD91C9-3AB8-81F8-9C61-C96FBC8E6863}"/>
+                <a16:creationId xmlns:a16="http://schemas.microsoft.com/office/drawing/2014/main" id="{2F32FA56-9B97-699D-EE77-6565B5BC2195}"/>
               </a:ext>
             </a:extLst>
           </p:cNvPr>
@@ -4046,7 +4046,7 @@
           <p:cNvPr id="4" name="テキスト ボックス 3">
             <a:extLst>
               <a:ext uri="{FF2B5EF4-FFF2-40B4-BE49-F238E27FC236}">
-                <a16:creationId xmlns:a16="http://schemas.microsoft.com/office/drawing/2014/main" id="{B2D15B5E-B8FA-D9AD-5ED8-E8AE6EE05970}"/>
+                <a16:creationId xmlns:a16="http://schemas.microsoft.com/office/drawing/2014/main" id="{8553EEAA-ED05-6C07-6218-735AABB8B6A8}"/>
               </a:ext>
             </a:extLst>
           </p:cNvPr>
@@ -4076,14 +4076,17 @@
                 </a:solidFill>
                 <a:latin typeface="Arial" panose="020B0604020202020204" pitchFamily="34" charset="0"/>
               </a:rPr>
-              <a:t>Gyosei Quiz One Recommended repository: gyosei quiz one Confirmed domain: gyoseiquiz</a:t>
-            </a:r>
-            <a:endParaRPr kumimoji="1" lang="ja-JP" altLang="en-US" sz="2000">
-              <a:solidFill>
-                <a:srgbClr val="333333"/>
-              </a:solidFill>
-              <a:latin typeface="Arial" panose="020B0604020202020204" pitchFamily="34" charset="0"/>
-            </a:endParaRPr>
+              <a:t>Gyosei Quiz One</a:t>
+            </a:r>
+            <a:r>
+              <a:rPr kumimoji="1" lang="ja-JP" altLang="en-US" sz="2000">
+                <a:solidFill>
+                  <a:srgbClr val="333333"/>
+                </a:solidFill>
+                <a:latin typeface="Arial" panose="020B0604020202020204" pitchFamily="34" charset="0"/>
+              </a:rPr>
+              <a:t>の目的、構成、実装を公開コードから確認できるプロジェクトです。</a:t>
+            </a:r>
           </a:p>
         </p:txBody>
       </p:sp>
@@ -4092,7 +4095,7 @@
           <p:cNvPr id="5" name="テキスト ボックス 4">
             <a:extLst>
               <a:ext uri="{FF2B5EF4-FFF2-40B4-BE49-F238E27FC236}">
-                <a16:creationId xmlns:a16="http://schemas.microsoft.com/office/drawing/2014/main" id="{3AB8150A-DB60-5B7C-80A7-E0640FF50CB7}"/>
+                <a16:creationId xmlns:a16="http://schemas.microsoft.com/office/drawing/2014/main" id="{09DF47F8-CC01-07CC-DFAA-2D84BF744F73}"/>
               </a:ext>
             </a:extLst>
           </p:cNvPr>
@@ -4139,7 +4142,7 @@
             <a:hlinkClick r:id="" action="ppaction://media"/>
             <a:extLst>
               <a:ext uri="{FF2B5EF4-FFF2-40B4-BE49-F238E27FC236}">
-                <a16:creationId xmlns:a16="http://schemas.microsoft.com/office/drawing/2014/main" id="{5C0AC8E1-505E-D78E-D864-149C8E60B05A}"/>
+                <a16:creationId xmlns:a16="http://schemas.microsoft.com/office/drawing/2014/main" id="{0FF26DD6-F41C-C6EC-99D2-0B48CB5D77A2}"/>
               </a:ext>
             </a:extLst>
           </p:cNvPr>
@@ -4174,7 +4177,7 @@
     </p:spTree>
     <p:extLst>
       <p:ext uri="{BB962C8B-B14F-4D97-AF65-F5344CB8AC3E}">
-        <p14:creationId xmlns:p14="http://schemas.microsoft.com/office/powerpoint/2010/main" val="1773623706"/>
+        <p14:creationId xmlns:p14="http://schemas.microsoft.com/office/powerpoint/2010/main" val="2896296127"/>
       </p:ext>
     </p:extLst>
   </p:cSld>
@@ -4183,10 +4186,10 @@
   </p:clrMapOvr>
   <mc:AlternateContent xmlns:mc="http://schemas.openxmlformats.org/markup-compatibility/2006">
     <mc:Choice xmlns:p14="http://schemas.microsoft.com/office/powerpoint/2010/main" Requires="p14">
-      <p:transition spd="slow" p14:dur="2000" advTm="7000"/>
+      <p:transition spd="slow" p14:dur="2000" advTm="8000"/>
     </mc:Choice>
     <mc:Fallback>
-      <p:transition spd="slow" advTm="7000"/>
+      <p:transition spd="slow" advTm="8000"/>
     </mc:Fallback>
   </mc:AlternateContent>
   <p:timing>
@@ -4217,7 +4220,7 @@
                                   <p:childTnLst>
                                     <p:cmd type="call" cmd="playFrom(0.0)">
                                       <p:cBhvr>
-                                        <p:cTn id="6" dur="6896" fill="hold"/>
+                                        <p:cTn id="6" dur="7201" fill="hold"/>
                                         <p:tgtEl>
                                           <p:spTgt spid="6"/>
                                         </p:tgtEl>
@@ -4298,7 +4301,7 @@
           <p:cNvPr id="2" name="テキスト ボックス 1">
             <a:extLst>
               <a:ext uri="{FF2B5EF4-FFF2-40B4-BE49-F238E27FC236}">
-                <a16:creationId xmlns:a16="http://schemas.microsoft.com/office/drawing/2014/main" id="{BC6C900D-EDF1-D9FE-E6CD-12CE1C6E5C2E}"/>
+                <a16:creationId xmlns:a16="http://schemas.microsoft.com/office/drawing/2014/main" id="{904D37C0-4D48-315C-20AF-E455E47457B2}"/>
               </a:ext>
             </a:extLst>
           </p:cNvPr>
@@ -4344,7 +4347,7 @@
           <p:cNvPr id="3" name="テキスト ボックス 2">
             <a:extLst>
               <a:ext uri="{FF2B5EF4-FFF2-40B4-BE49-F238E27FC236}">
-                <a16:creationId xmlns:a16="http://schemas.microsoft.com/office/drawing/2014/main" id="{DE7ACBC4-FAD4-093C-C272-D68A013CD382}"/>
+                <a16:creationId xmlns:a16="http://schemas.microsoft.com/office/drawing/2014/main" id="{818BC1CA-47C2-0F18-3CA4-EAE801BDB4A0}"/>
               </a:ext>
             </a:extLst>
           </p:cNvPr>
@@ -4384,7 +4387,7 @@
           <p:cNvPr id="4" name="テキスト ボックス 3">
             <a:extLst>
               <a:ext uri="{FF2B5EF4-FFF2-40B4-BE49-F238E27FC236}">
-                <a16:creationId xmlns:a16="http://schemas.microsoft.com/office/drawing/2014/main" id="{1A9B8D08-803F-B2D3-7075-DDE64EAEC4F5}"/>
+                <a16:creationId xmlns:a16="http://schemas.microsoft.com/office/drawing/2014/main" id="{E613FE22-5075-9F63-5944-C85E8AB432B0}"/>
               </a:ext>
             </a:extLst>
           </p:cNvPr>
@@ -4479,7 +4482,7 @@
           <p:cNvPr id="5" name="テキスト ボックス 4">
             <a:extLst>
               <a:ext uri="{FF2B5EF4-FFF2-40B4-BE49-F238E27FC236}">
-                <a16:creationId xmlns:a16="http://schemas.microsoft.com/office/drawing/2014/main" id="{392B85B8-BDD1-8177-6F2F-E75F513E8C24}"/>
+                <a16:creationId xmlns:a16="http://schemas.microsoft.com/office/drawing/2014/main" id="{F05B7D66-F33F-D3BA-675F-3A83091C37A5}"/>
               </a:ext>
             </a:extLst>
           </p:cNvPr>
@@ -4526,7 +4529,7 @@
             <a:hlinkClick r:id="" action="ppaction://media"/>
             <a:extLst>
               <a:ext uri="{FF2B5EF4-FFF2-40B4-BE49-F238E27FC236}">
-                <a16:creationId xmlns:a16="http://schemas.microsoft.com/office/drawing/2014/main" id="{6F199267-69DA-2C54-82FE-555C95E4FC88}"/>
+                <a16:creationId xmlns:a16="http://schemas.microsoft.com/office/drawing/2014/main" id="{DF6F7943-502B-42BE-F68D-35532C44EEDE}"/>
               </a:ext>
             </a:extLst>
           </p:cNvPr>
@@ -4561,7 +4564,7 @@
     </p:spTree>
     <p:extLst>
       <p:ext uri="{BB962C8B-B14F-4D97-AF65-F5344CB8AC3E}">
-        <p14:creationId xmlns:p14="http://schemas.microsoft.com/office/powerpoint/2010/main" val="1740028713"/>
+        <p14:creationId xmlns:p14="http://schemas.microsoft.com/office/powerpoint/2010/main" val="1688002136"/>
       </p:ext>
     </p:extLst>
   </p:cSld>
@@ -4685,7 +4688,7 @@
           <p:cNvPr id="2" name="テキスト ボックス 1">
             <a:extLst>
               <a:ext uri="{FF2B5EF4-FFF2-40B4-BE49-F238E27FC236}">
-                <a16:creationId xmlns:a16="http://schemas.microsoft.com/office/drawing/2014/main" id="{F650D0A4-FCBB-519C-5196-6A2907A49396}"/>
+                <a16:creationId xmlns:a16="http://schemas.microsoft.com/office/drawing/2014/main" id="{3F4FB32F-22A4-B038-F8A2-64646D5E86DA}"/>
               </a:ext>
             </a:extLst>
           </p:cNvPr>
@@ -4731,7 +4734,7 @@
           <p:cNvPr id="3" name="テキスト ボックス 2">
             <a:extLst>
               <a:ext uri="{FF2B5EF4-FFF2-40B4-BE49-F238E27FC236}">
-                <a16:creationId xmlns:a16="http://schemas.microsoft.com/office/drawing/2014/main" id="{CAF6947D-BFD2-AA6A-422A-8CAFB1B6341C}"/>
+                <a16:creationId xmlns:a16="http://schemas.microsoft.com/office/drawing/2014/main" id="{542FF8F6-BE12-C286-197C-8B939C3F8812}"/>
               </a:ext>
             </a:extLst>
           </p:cNvPr>
@@ -4771,7 +4774,7 @@
           <p:cNvPr id="4" name="テキスト ボックス 3">
             <a:extLst>
               <a:ext uri="{FF2B5EF4-FFF2-40B4-BE49-F238E27FC236}">
-                <a16:creationId xmlns:a16="http://schemas.microsoft.com/office/drawing/2014/main" id="{8176B80C-332E-7A9C-187D-B4F360558DA3}"/>
+                <a16:creationId xmlns:a16="http://schemas.microsoft.com/office/drawing/2014/main" id="{99C48CF2-BF6B-62B8-06E8-038BBA860774}"/>
               </a:ext>
             </a:extLst>
           </p:cNvPr>
@@ -4881,7 +4884,7 @@
           <p:cNvPr id="5" name="テキスト ボックス 4">
             <a:extLst>
               <a:ext uri="{FF2B5EF4-FFF2-40B4-BE49-F238E27FC236}">
-                <a16:creationId xmlns:a16="http://schemas.microsoft.com/office/drawing/2014/main" id="{13E5293F-B6E4-555F-D3CA-C9C30E810C6D}"/>
+                <a16:creationId xmlns:a16="http://schemas.microsoft.com/office/drawing/2014/main" id="{885D637D-F8E7-FEA3-7673-31EB2316B514}"/>
               </a:ext>
             </a:extLst>
           </p:cNvPr>
@@ -4928,7 +4931,7 @@
             <a:hlinkClick r:id="" action="ppaction://media"/>
             <a:extLst>
               <a:ext uri="{FF2B5EF4-FFF2-40B4-BE49-F238E27FC236}">
-                <a16:creationId xmlns:a16="http://schemas.microsoft.com/office/drawing/2014/main" id="{F647FAFF-14EE-EA5C-BF69-D45680A1DDB5}"/>
+                <a16:creationId xmlns:a16="http://schemas.microsoft.com/office/drawing/2014/main" id="{576E5CAE-ED3D-D108-BACB-3F7551DDFD9F}"/>
               </a:ext>
             </a:extLst>
           </p:cNvPr>
@@ -4963,7 +4966,7 @@
     </p:spTree>
     <p:extLst>
       <p:ext uri="{BB962C8B-B14F-4D97-AF65-F5344CB8AC3E}">
-        <p14:creationId xmlns:p14="http://schemas.microsoft.com/office/powerpoint/2010/main" val="422207499"/>
+        <p14:creationId xmlns:p14="http://schemas.microsoft.com/office/powerpoint/2010/main" val="1832404194"/>
       </p:ext>
     </p:extLst>
   </p:cSld>
@@ -5087,7 +5090,7 @@
           <p:cNvPr id="2" name="テキスト ボックス 1">
             <a:extLst>
               <a:ext uri="{FF2B5EF4-FFF2-40B4-BE49-F238E27FC236}">
-                <a16:creationId xmlns:a16="http://schemas.microsoft.com/office/drawing/2014/main" id="{6A6F45E5-4C5B-4779-C5D8-0E122EAF8F13}"/>
+                <a16:creationId xmlns:a16="http://schemas.microsoft.com/office/drawing/2014/main" id="{626F7C2D-C181-CF06-F056-8119C7D1CB6B}"/>
               </a:ext>
             </a:extLst>
           </p:cNvPr>
@@ -5133,7 +5136,7 @@
           <p:cNvPr id="3" name="テキスト ボックス 2">
             <a:extLst>
               <a:ext uri="{FF2B5EF4-FFF2-40B4-BE49-F238E27FC236}">
-                <a16:creationId xmlns:a16="http://schemas.microsoft.com/office/drawing/2014/main" id="{77916B13-026E-1E14-F9B8-3E3AAC0382EC}"/>
+                <a16:creationId xmlns:a16="http://schemas.microsoft.com/office/drawing/2014/main" id="{863DE1E3-E3F4-0157-2225-E60E70C3B02A}"/>
               </a:ext>
             </a:extLst>
           </p:cNvPr>
@@ -5173,7 +5176,7 @@
           <p:cNvPr id="4" name="テキスト ボックス 3">
             <a:extLst>
               <a:ext uri="{FF2B5EF4-FFF2-40B4-BE49-F238E27FC236}">
-                <a16:creationId xmlns:a16="http://schemas.microsoft.com/office/drawing/2014/main" id="{61B1500A-8032-1E20-B387-F0DA3DA5C827}"/>
+                <a16:creationId xmlns:a16="http://schemas.microsoft.com/office/drawing/2014/main" id="{0691A77F-0973-31E0-1CDD-93EA77EBE742}"/>
               </a:ext>
             </a:extLst>
           </p:cNvPr>
@@ -5197,20 +5200,14 @@
           <a:lstStyle/>
           <a:p>
             <a:r>
-              <a:rPr kumimoji="1" lang="en-US" altLang="ja-JP" sz="2000">
+              <a:rPr kumimoji="1" lang="ja-JP" altLang="en-US" sz="2000">
                 <a:solidFill>
                   <a:srgbClr val="333333"/>
                 </a:solidFill>
                 <a:latin typeface="Arial" panose="020B0604020202020204" pitchFamily="34" charset="0"/>
               </a:rPr>
-              <a:t>Set confirmed custom domain</a:t>
-            </a:r>
-            <a:endParaRPr kumimoji="1" lang="ja-JP" altLang="en-US" sz="2000">
-              <a:solidFill>
-                <a:srgbClr val="333333"/>
-              </a:solidFill>
-              <a:latin typeface="Arial" panose="020B0604020202020204" pitchFamily="34" charset="0"/>
-            </a:endParaRPr>
+              <a:t>直近のコミットでは、実装の見直しと継続的な改善が行われました。</a:t>
+            </a:r>
           </a:p>
         </p:txBody>
       </p:sp>
@@ -5219,7 +5216,7 @@
           <p:cNvPr id="5" name="テキスト ボックス 4">
             <a:extLst>
               <a:ext uri="{FF2B5EF4-FFF2-40B4-BE49-F238E27FC236}">
-                <a16:creationId xmlns:a16="http://schemas.microsoft.com/office/drawing/2014/main" id="{8EE7AC86-5817-F74C-5AEE-9EBA994ACFCC}"/>
+                <a16:creationId xmlns:a16="http://schemas.microsoft.com/office/drawing/2014/main" id="{C6EA3D3E-4554-5ED0-D104-44586A3EBA59}"/>
               </a:ext>
             </a:extLst>
           </p:cNvPr>
@@ -5266,7 +5263,7 @@
             <a:hlinkClick r:id="" action="ppaction://media"/>
             <a:extLst>
               <a:ext uri="{FF2B5EF4-FFF2-40B4-BE49-F238E27FC236}">
-                <a16:creationId xmlns:a16="http://schemas.microsoft.com/office/drawing/2014/main" id="{1C964B99-E9B4-E4A9-82CC-4AFBD1F80827}"/>
+                <a16:creationId xmlns:a16="http://schemas.microsoft.com/office/drawing/2014/main" id="{E8B0A279-EE0A-A46F-30A7-E443F2AFAAB9}"/>
               </a:ext>
             </a:extLst>
           </p:cNvPr>
@@ -5301,7 +5298,7 @@
     </p:spTree>
     <p:extLst>
       <p:ext uri="{BB962C8B-B14F-4D97-AF65-F5344CB8AC3E}">
-        <p14:creationId xmlns:p14="http://schemas.microsoft.com/office/powerpoint/2010/main" val="1482618238"/>
+        <p14:creationId xmlns:p14="http://schemas.microsoft.com/office/powerpoint/2010/main" val="597377626"/>
       </p:ext>
     </p:extLst>
   </p:cSld>
@@ -5344,7 +5341,7 @@
                                   <p:childTnLst>
                                     <p:cmd type="call" cmd="playFrom(0.0)">
                                       <p:cBhvr>
-                                        <p:cTn id="6" dur="6451" fill="hold"/>
+                                        <p:cTn id="6" dur="6076" fill="hold"/>
                                         <p:tgtEl>
                                           <p:spTgt spid="6"/>
                                         </p:tgtEl>
@@ -5425,7 +5422,7 @@
           <p:cNvPr id="2" name="テキスト ボックス 1">
             <a:extLst>
               <a:ext uri="{FF2B5EF4-FFF2-40B4-BE49-F238E27FC236}">
-                <a16:creationId xmlns:a16="http://schemas.microsoft.com/office/drawing/2014/main" id="{68770ECA-14BF-2F78-DD63-BFDBC45570CA}"/>
+                <a16:creationId xmlns:a16="http://schemas.microsoft.com/office/drawing/2014/main" id="{16136FAD-6C35-F59E-1239-6B4EADD91B85}"/>
               </a:ext>
             </a:extLst>
           </p:cNvPr>
@@ -5471,7 +5468,7 @@
           <p:cNvPr id="3" name="テキスト ボックス 2">
             <a:extLst>
               <a:ext uri="{FF2B5EF4-FFF2-40B4-BE49-F238E27FC236}">
-                <a16:creationId xmlns:a16="http://schemas.microsoft.com/office/drawing/2014/main" id="{E94974AB-F804-F010-7C25-1EAAC326290E}"/>
+                <a16:creationId xmlns:a16="http://schemas.microsoft.com/office/drawing/2014/main" id="{08AD4F7D-0FBD-0995-7258-8C71037D5EC5}"/>
               </a:ext>
             </a:extLst>
           </p:cNvPr>
@@ -5511,7 +5508,7 @@
           <p:cNvPr id="4" name="テキスト ボックス 3">
             <a:extLst>
               <a:ext uri="{FF2B5EF4-FFF2-40B4-BE49-F238E27FC236}">
-                <a16:creationId xmlns:a16="http://schemas.microsoft.com/office/drawing/2014/main" id="{12C2A64B-40EA-6164-F5E9-F2E81C4E3C45}"/>
+                <a16:creationId xmlns:a16="http://schemas.microsoft.com/office/drawing/2014/main" id="{1E51F1BF-EBBB-1717-3630-193627D4777D}"/>
               </a:ext>
             </a:extLst>
           </p:cNvPr>
@@ -5576,7 +5573,7 @@
           <p:cNvPr id="5" name="テキスト ボックス 4">
             <a:extLst>
               <a:ext uri="{FF2B5EF4-FFF2-40B4-BE49-F238E27FC236}">
-                <a16:creationId xmlns:a16="http://schemas.microsoft.com/office/drawing/2014/main" id="{C4C7586A-73A2-34AE-2AAB-9689C60D637F}"/>
+                <a16:creationId xmlns:a16="http://schemas.microsoft.com/office/drawing/2014/main" id="{5FDE569F-446F-B3C4-F864-156E5D9361C5}"/>
               </a:ext>
             </a:extLst>
           </p:cNvPr>
@@ -5623,7 +5620,7 @@
             <a:hlinkClick r:id="" action="ppaction://media"/>
             <a:extLst>
               <a:ext uri="{FF2B5EF4-FFF2-40B4-BE49-F238E27FC236}">
-                <a16:creationId xmlns:a16="http://schemas.microsoft.com/office/drawing/2014/main" id="{26EDD9CC-D38A-94B4-D631-B7F8FCAE5D8E}"/>
+                <a16:creationId xmlns:a16="http://schemas.microsoft.com/office/drawing/2014/main" id="{AC9BEC4E-E2E7-8223-A8BD-5E0FF2C1EC5F}"/>
               </a:ext>
             </a:extLst>
           </p:cNvPr>
@@ -5658,7 +5655,7 @@
     </p:spTree>
     <p:extLst>
       <p:ext uri="{BB962C8B-B14F-4D97-AF65-F5344CB8AC3E}">
-        <p14:creationId xmlns:p14="http://schemas.microsoft.com/office/powerpoint/2010/main" val="2551132894"/>
+        <p14:creationId xmlns:p14="http://schemas.microsoft.com/office/powerpoint/2010/main" val="3909183685"/>
       </p:ext>
     </p:extLst>
   </p:cSld>
